--- a/SQLBits T-SQL Code analysis.pptx
+++ b/SQLBits T-SQL Code analysis.pptx
@@ -16,8 +16,8 @@
     <p:sldId id="292" r:id="rId10"/>
     <p:sldId id="284" r:id="rId11"/>
     <p:sldId id="286" r:id="rId12"/>
-    <p:sldId id="283" r:id="rId13"/>
-    <p:sldId id="266" r:id="rId14"/>
+    <p:sldId id="266" r:id="rId13"/>
+    <p:sldId id="283" r:id="rId14"/>
     <p:sldId id="257" r:id="rId15"/>
     <p:sldId id="256" r:id="rId16"/>
     <p:sldId id="258" r:id="rId17"/>
@@ -18970,228 +18970,6 @@
 <file path=ppt/slides/slide12.xml><?xml version="1.0" encoding="utf-8"?>
 <p:sld xmlns:a="http://schemas.openxmlformats.org/drawingml/2006/main" xmlns:r="http://schemas.openxmlformats.org/officeDocument/2006/relationships" xmlns:p="http://schemas.openxmlformats.org/presentationml/2006/main">
   <p:cSld>
-    <p:spTree>
-      <p:nvGrpSpPr>
-        <p:cNvPr id="1" name="">
-          <a:extLst>
-            <a:ext uri="{FF2B5EF4-FFF2-40B4-BE49-F238E27FC236}">
-              <a16:creationId xmlns:a16="http://schemas.microsoft.com/office/drawing/2014/main" id="{C03D46EE-FF28-5231-08CB-F5FDBAC097A5}"/>
-            </a:ext>
-          </a:extLst>
-        </p:cNvPr>
-        <p:cNvGrpSpPr/>
-        <p:nvPr/>
-      </p:nvGrpSpPr>
-      <p:grpSpPr>
-        <a:xfrm>
-          <a:off x="0" y="0"/>
-          <a:ext cx="0" cy="0"/>
-          <a:chOff x="0" y="0"/>
-          <a:chExt cx="0" cy="0"/>
-        </a:xfrm>
-      </p:grpSpPr>
-      <p:sp>
-        <p:nvSpPr>
-          <p:cNvPr id="2" name="Title 1">
-            <a:extLst>
-              <a:ext uri="{FF2B5EF4-FFF2-40B4-BE49-F238E27FC236}">
-                <a16:creationId xmlns:a16="http://schemas.microsoft.com/office/drawing/2014/main" id="{2E6EEB31-E4FC-2566-C8F1-45B5FB08A41F}"/>
-              </a:ext>
-            </a:extLst>
-          </p:cNvPr>
-          <p:cNvSpPr>
-            <a:spLocks noGrp="1"/>
-          </p:cNvSpPr>
-          <p:nvPr>
-            <p:ph type="title"/>
-          </p:nvPr>
-        </p:nvSpPr>
-        <p:spPr/>
-        <p:txBody>
-          <a:bodyPr/>
-          <a:lstStyle/>
-          <a:p>
-            <a:r>
-              <a:rPr lang="da-DK" dirty="0"/>
-              <a:t>Q  &amp; A</a:t>
-            </a:r>
-          </a:p>
-        </p:txBody>
-      </p:sp>
-      <p:sp>
-        <p:nvSpPr>
-          <p:cNvPr id="3" name="Content Placeholder 2">
-            <a:extLst>
-              <a:ext uri="{FF2B5EF4-FFF2-40B4-BE49-F238E27FC236}">
-                <a16:creationId xmlns:a16="http://schemas.microsoft.com/office/drawing/2014/main" id="{47C55434-F03A-B8A3-C83A-165FC3B93CD3}"/>
-              </a:ext>
-            </a:extLst>
-          </p:cNvPr>
-          <p:cNvSpPr>
-            <a:spLocks noGrp="1"/>
-          </p:cNvSpPr>
-          <p:nvPr>
-            <p:ph idx="1"/>
-          </p:nvPr>
-        </p:nvSpPr>
-        <p:spPr/>
-        <p:txBody>
-          <a:bodyPr>
-            <a:normAutofit/>
-          </a:bodyPr>
-          <a:lstStyle/>
-          <a:p>
-            <a:r>
-              <a:rPr lang="da-DK" sz="3200" dirty="0" err="1"/>
-              <a:t>Sharing</a:t>
-            </a:r>
-            <a:r>
-              <a:rPr lang="da-DK" sz="3200" dirty="0"/>
-              <a:t> parts of a database (</a:t>
-            </a:r>
-            <a:r>
-              <a:rPr lang="da-DK" sz="3200" dirty="0" err="1"/>
-              <a:t>f.ex</a:t>
-            </a:r>
-            <a:r>
-              <a:rPr lang="da-DK" sz="3200" dirty="0"/>
-              <a:t>. </a:t>
-            </a:r>
-            <a:r>
-              <a:rPr lang="da-DK" sz="3200" dirty="0" err="1"/>
-              <a:t>monitoring</a:t>
-            </a:r>
-            <a:r>
-              <a:rPr lang="da-DK" sz="3200" dirty="0"/>
-              <a:t>) ?</a:t>
-            </a:r>
-          </a:p>
-          <a:p>
-            <a:r>
-              <a:rPr lang="da-DK" sz="3200" dirty="0" err="1"/>
-              <a:t>What</a:t>
-            </a:r>
-            <a:r>
-              <a:rPr lang="da-DK" sz="3200" dirty="0"/>
-              <a:t> </a:t>
-            </a:r>
-            <a:r>
-              <a:rPr lang="da-DK" sz="3200" dirty="0" err="1"/>
-              <a:t>if</a:t>
-            </a:r>
-            <a:r>
-              <a:rPr lang="da-DK" sz="3200" dirty="0"/>
-              <a:t> </a:t>
-            </a:r>
-            <a:r>
-              <a:rPr lang="da-DK" sz="3200" dirty="0" err="1"/>
-              <a:t>my</a:t>
-            </a:r>
-            <a:r>
-              <a:rPr lang="da-DK" sz="3200" dirty="0"/>
-              <a:t> </a:t>
-            </a:r>
-            <a:r>
-              <a:rPr lang="da-DK" sz="3200" dirty="0" err="1"/>
-              <a:t>db</a:t>
-            </a:r>
-            <a:r>
-              <a:rPr lang="da-DK" sz="3200" dirty="0"/>
-              <a:t> has </a:t>
-            </a:r>
-            <a:r>
-              <a:rPr lang="da-DK" sz="3200" dirty="0" err="1"/>
-              <a:t>dependencies</a:t>
-            </a:r>
-            <a:r>
-              <a:rPr lang="da-DK" sz="3200" dirty="0"/>
-              <a:t> on </a:t>
-            </a:r>
-            <a:r>
-              <a:rPr lang="da-DK" sz="3200" dirty="0" err="1"/>
-              <a:t>other</a:t>
-            </a:r>
-            <a:r>
-              <a:rPr lang="da-DK" sz="3200" dirty="0"/>
-              <a:t> database?</a:t>
-            </a:r>
-          </a:p>
-          <a:p>
-            <a:r>
-              <a:rPr lang="da-DK" sz="3200" dirty="0"/>
-              <a:t>How </a:t>
-            </a:r>
-            <a:r>
-              <a:rPr lang="da-DK" sz="3200" dirty="0" err="1"/>
-              <a:t>would</a:t>
-            </a:r>
-            <a:r>
-              <a:rPr lang="da-DK" sz="3200" dirty="0"/>
-              <a:t> </a:t>
-            </a:r>
-            <a:r>
-              <a:rPr lang="da-DK" sz="3200" dirty="0" err="1"/>
-              <a:t>this</a:t>
-            </a:r>
-            <a:r>
-              <a:rPr lang="da-DK" sz="3200" dirty="0"/>
-              <a:t> </a:t>
-            </a:r>
-            <a:r>
-              <a:rPr lang="da-DK" sz="3200" dirty="0" err="1"/>
-              <a:t>work</a:t>
-            </a:r>
-            <a:r>
-              <a:rPr lang="da-DK" sz="3200" dirty="0"/>
-              <a:t> with EF Core?</a:t>
-            </a:r>
-          </a:p>
-          <a:p>
-            <a:r>
-              <a:rPr lang="da-DK" sz="3200" dirty="0"/>
-              <a:t>How </a:t>
-            </a:r>
-            <a:r>
-              <a:rPr lang="da-DK" sz="3200" dirty="0" err="1"/>
-              <a:t>about</a:t>
-            </a:r>
-            <a:r>
-              <a:rPr lang="da-DK" sz="3200" dirty="0"/>
-              <a:t> .NET </a:t>
-            </a:r>
-            <a:r>
-              <a:rPr lang="da-DK" sz="3200" dirty="0" err="1"/>
-              <a:t>Aspire</a:t>
-            </a:r>
-            <a:r>
-              <a:rPr lang="da-DK" sz="3200" dirty="0"/>
-              <a:t>?</a:t>
-            </a:r>
-          </a:p>
-          <a:p>
-            <a:pPr marL="0" indent="0">
-              <a:buNone/>
-            </a:pPr>
-            <a:endParaRPr lang="da-DK" sz="3200" dirty="0"/>
-          </a:p>
-        </p:txBody>
-      </p:sp>
-    </p:spTree>
-    <p:extLst>
-      <p:ext uri="{BB962C8B-B14F-4D97-AF65-F5344CB8AC3E}">
-        <p14:creationId xmlns:p14="http://schemas.microsoft.com/office/powerpoint/2010/main" val="3608072289"/>
-      </p:ext>
-    </p:extLst>
-  </p:cSld>
-  <p:clrMapOvr>
-    <a:masterClrMapping/>
-  </p:clrMapOvr>
-</p:sld>
-</file>
-
-<file path=ppt/slides/slide13.xml><?xml version="1.0" encoding="utf-8"?>
-<p:sld xmlns:a="http://schemas.openxmlformats.org/drawingml/2006/main" xmlns:r="http://schemas.openxmlformats.org/officeDocument/2006/relationships" xmlns:p="http://schemas.openxmlformats.org/presentationml/2006/main">
-  <p:cSld>
     <p:bg>
       <p:bgPr>
         <a:solidFill>
@@ -19782,6 +19560,228 @@
     <p:extLst>
       <p:ext uri="{BB962C8B-B14F-4D97-AF65-F5344CB8AC3E}">
         <p14:creationId xmlns:p14="http://schemas.microsoft.com/office/powerpoint/2010/main" val="1406646759"/>
+      </p:ext>
+    </p:extLst>
+  </p:cSld>
+  <p:clrMapOvr>
+    <a:masterClrMapping/>
+  </p:clrMapOvr>
+</p:sld>
+</file>
+
+<file path=ppt/slides/slide13.xml><?xml version="1.0" encoding="utf-8"?>
+<p:sld xmlns:a="http://schemas.openxmlformats.org/drawingml/2006/main" xmlns:r="http://schemas.openxmlformats.org/officeDocument/2006/relationships" xmlns:p="http://schemas.openxmlformats.org/presentationml/2006/main">
+  <p:cSld>
+    <p:spTree>
+      <p:nvGrpSpPr>
+        <p:cNvPr id="1" name="">
+          <a:extLst>
+            <a:ext uri="{FF2B5EF4-FFF2-40B4-BE49-F238E27FC236}">
+              <a16:creationId xmlns:a16="http://schemas.microsoft.com/office/drawing/2014/main" id="{C03D46EE-FF28-5231-08CB-F5FDBAC097A5}"/>
+            </a:ext>
+          </a:extLst>
+        </p:cNvPr>
+        <p:cNvGrpSpPr/>
+        <p:nvPr/>
+      </p:nvGrpSpPr>
+      <p:grpSpPr>
+        <a:xfrm>
+          <a:off x="0" y="0"/>
+          <a:ext cx="0" cy="0"/>
+          <a:chOff x="0" y="0"/>
+          <a:chExt cx="0" cy="0"/>
+        </a:xfrm>
+      </p:grpSpPr>
+      <p:sp>
+        <p:nvSpPr>
+          <p:cNvPr id="2" name="Title 1">
+            <a:extLst>
+              <a:ext uri="{FF2B5EF4-FFF2-40B4-BE49-F238E27FC236}">
+                <a16:creationId xmlns:a16="http://schemas.microsoft.com/office/drawing/2014/main" id="{2E6EEB31-E4FC-2566-C8F1-45B5FB08A41F}"/>
+              </a:ext>
+            </a:extLst>
+          </p:cNvPr>
+          <p:cNvSpPr>
+            <a:spLocks noGrp="1"/>
+          </p:cNvSpPr>
+          <p:nvPr>
+            <p:ph type="title"/>
+          </p:nvPr>
+        </p:nvSpPr>
+        <p:spPr/>
+        <p:txBody>
+          <a:bodyPr/>
+          <a:lstStyle/>
+          <a:p>
+            <a:r>
+              <a:rPr lang="da-DK" dirty="0"/>
+              <a:t>Q  &amp; A</a:t>
+            </a:r>
+          </a:p>
+        </p:txBody>
+      </p:sp>
+      <p:sp>
+        <p:nvSpPr>
+          <p:cNvPr id="3" name="Content Placeholder 2">
+            <a:extLst>
+              <a:ext uri="{FF2B5EF4-FFF2-40B4-BE49-F238E27FC236}">
+                <a16:creationId xmlns:a16="http://schemas.microsoft.com/office/drawing/2014/main" id="{47C55434-F03A-B8A3-C83A-165FC3B93CD3}"/>
+              </a:ext>
+            </a:extLst>
+          </p:cNvPr>
+          <p:cNvSpPr>
+            <a:spLocks noGrp="1"/>
+          </p:cNvSpPr>
+          <p:nvPr>
+            <p:ph idx="1"/>
+          </p:nvPr>
+        </p:nvSpPr>
+        <p:spPr/>
+        <p:txBody>
+          <a:bodyPr>
+            <a:normAutofit/>
+          </a:bodyPr>
+          <a:lstStyle/>
+          <a:p>
+            <a:r>
+              <a:rPr lang="da-DK" sz="3200" dirty="0" err="1"/>
+              <a:t>Sharing</a:t>
+            </a:r>
+            <a:r>
+              <a:rPr lang="da-DK" sz="3200" dirty="0"/>
+              <a:t> parts of a database (</a:t>
+            </a:r>
+            <a:r>
+              <a:rPr lang="da-DK" sz="3200" dirty="0" err="1"/>
+              <a:t>f.ex</a:t>
+            </a:r>
+            <a:r>
+              <a:rPr lang="da-DK" sz="3200" dirty="0"/>
+              <a:t>. </a:t>
+            </a:r>
+            <a:r>
+              <a:rPr lang="da-DK" sz="3200" dirty="0" err="1"/>
+              <a:t>monitoring</a:t>
+            </a:r>
+            <a:r>
+              <a:rPr lang="da-DK" sz="3200" dirty="0"/>
+              <a:t>) ?</a:t>
+            </a:r>
+          </a:p>
+          <a:p>
+            <a:r>
+              <a:rPr lang="da-DK" sz="3200" dirty="0" err="1"/>
+              <a:t>What</a:t>
+            </a:r>
+            <a:r>
+              <a:rPr lang="da-DK" sz="3200" dirty="0"/>
+              <a:t> </a:t>
+            </a:r>
+            <a:r>
+              <a:rPr lang="da-DK" sz="3200" dirty="0" err="1"/>
+              <a:t>if</a:t>
+            </a:r>
+            <a:r>
+              <a:rPr lang="da-DK" sz="3200" dirty="0"/>
+              <a:t> </a:t>
+            </a:r>
+            <a:r>
+              <a:rPr lang="da-DK" sz="3200" dirty="0" err="1"/>
+              <a:t>my</a:t>
+            </a:r>
+            <a:r>
+              <a:rPr lang="da-DK" sz="3200" dirty="0"/>
+              <a:t> </a:t>
+            </a:r>
+            <a:r>
+              <a:rPr lang="da-DK" sz="3200" dirty="0" err="1"/>
+              <a:t>db</a:t>
+            </a:r>
+            <a:r>
+              <a:rPr lang="da-DK" sz="3200" dirty="0"/>
+              <a:t> has </a:t>
+            </a:r>
+            <a:r>
+              <a:rPr lang="da-DK" sz="3200" dirty="0" err="1"/>
+              <a:t>dependencies</a:t>
+            </a:r>
+            <a:r>
+              <a:rPr lang="da-DK" sz="3200" dirty="0"/>
+              <a:t> on </a:t>
+            </a:r>
+            <a:r>
+              <a:rPr lang="da-DK" sz="3200" dirty="0" err="1"/>
+              <a:t>other</a:t>
+            </a:r>
+            <a:r>
+              <a:rPr lang="da-DK" sz="3200" dirty="0"/>
+              <a:t> database?</a:t>
+            </a:r>
+          </a:p>
+          <a:p>
+            <a:r>
+              <a:rPr lang="da-DK" sz="3200" dirty="0"/>
+              <a:t>How </a:t>
+            </a:r>
+            <a:r>
+              <a:rPr lang="da-DK" sz="3200" dirty="0" err="1"/>
+              <a:t>would</a:t>
+            </a:r>
+            <a:r>
+              <a:rPr lang="da-DK" sz="3200" dirty="0"/>
+              <a:t> </a:t>
+            </a:r>
+            <a:r>
+              <a:rPr lang="da-DK" sz="3200" dirty="0" err="1"/>
+              <a:t>this</a:t>
+            </a:r>
+            <a:r>
+              <a:rPr lang="da-DK" sz="3200" dirty="0"/>
+              <a:t> </a:t>
+            </a:r>
+            <a:r>
+              <a:rPr lang="da-DK" sz="3200" dirty="0" err="1"/>
+              <a:t>work</a:t>
+            </a:r>
+            <a:r>
+              <a:rPr lang="da-DK" sz="3200" dirty="0"/>
+              <a:t> with EF Core?</a:t>
+            </a:r>
+          </a:p>
+          <a:p>
+            <a:r>
+              <a:rPr lang="da-DK" sz="3200" dirty="0"/>
+              <a:t>How </a:t>
+            </a:r>
+            <a:r>
+              <a:rPr lang="da-DK" sz="3200" dirty="0" err="1"/>
+              <a:t>about</a:t>
+            </a:r>
+            <a:r>
+              <a:rPr lang="da-DK" sz="3200" dirty="0"/>
+              <a:t> .NET </a:t>
+            </a:r>
+            <a:r>
+              <a:rPr lang="da-DK" sz="3200" dirty="0" err="1"/>
+              <a:t>Aspire</a:t>
+            </a:r>
+            <a:r>
+              <a:rPr lang="da-DK" sz="3200" dirty="0"/>
+              <a:t>?</a:t>
+            </a:r>
+          </a:p>
+          <a:p>
+            <a:pPr marL="0" indent="0">
+              <a:buNone/>
+            </a:pPr>
+            <a:endParaRPr lang="da-DK" sz="3200" dirty="0"/>
+          </a:p>
+        </p:txBody>
+      </p:sp>
+    </p:spTree>
+    <p:extLst>
+      <p:ext uri="{BB962C8B-B14F-4D97-AF65-F5344CB8AC3E}">
+        <p14:creationId xmlns:p14="http://schemas.microsoft.com/office/powerpoint/2010/main" val="3608072289"/>
       </p:ext>
     </p:extLst>
   </p:cSld>
